--- a/HSKIM RL PPT.pptx
+++ b/HSKIM RL PPT.pptx
@@ -244,7 +244,7 @@
           <a:p>
             <a:fld id="{F3CEFB18-4847-7440-8483-DF1730707B17}" type="datetimeFigureOut">
               <a:rPr kumimoji="1" lang="ko-KR" altLang="en-US" smtClean="0"/>
-              <a:t>2026. 4. 27.</a:t>
+              <a:t>2026. 4. 28.</a:t>
             </a:fld>
             <a:endParaRPr kumimoji="1" lang="ko-KR" altLang="en-US"/>
           </a:p>
@@ -665,7 +665,7 @@
             </a:pPr>
             <a:fld id="{65193021-B57C-154E-AECA-2D7DE6A1694E}" type="datetime1">
               <a:rPr lang="ko-KR" altLang="en-US" smtClean="0"/>
-              <a:t>2026. 4. 27.</a:t>
+              <a:t>2026. 4. 28.</a:t>
             </a:fld>
             <a:endParaRPr lang="en-US"/>
           </a:p>
@@ -882,7 +882,7 @@
             </a:pPr>
             <a:fld id="{AFA22593-972C-4F40-A6EC-1C6C3C49B07A}" type="datetime1">
               <a:rPr lang="ko-KR" altLang="en-US" smtClean="0"/>
-              <a:t>2026. 4. 27.</a:t>
+              <a:t>2026. 4. 28.</a:t>
             </a:fld>
             <a:endParaRPr lang="en-US"/>
           </a:p>
@@ -1109,7 +1109,7 @@
             </a:pPr>
             <a:fld id="{9E38A2B6-21FF-E34E-BCB2-8DE0CC0BAE0B}" type="datetime1">
               <a:rPr lang="ko-KR" altLang="en-US" smtClean="0"/>
-              <a:t>2026. 4. 27.</a:t>
+              <a:t>2026. 4. 28.</a:t>
             </a:fld>
             <a:endParaRPr lang="en-US"/>
           </a:p>
@@ -1377,7 +1377,7 @@
             </a:pPr>
             <a:fld id="{CB7FBAAA-16AD-A448-9E12-8E6415F36951}" type="datetime1">
               <a:rPr lang="ko-KR" altLang="en-US" smtClean="0"/>
-              <a:t>2026. 4. 27.</a:t>
+              <a:t>2026. 4. 28.</a:t>
             </a:fld>
             <a:endParaRPr lang="en-US"/>
           </a:p>
@@ -1819,7 +1819,7 @@
             </a:pPr>
             <a:fld id="{82E6DE02-8F40-A440-98C5-01D67D792CEC}" type="datetime1">
               <a:rPr lang="ko-KR" altLang="en-US" smtClean="0"/>
-              <a:t>2026. 4. 27.</a:t>
+              <a:t>2026. 4. 28.</a:t>
             </a:fld>
             <a:endParaRPr lang="en-US"/>
           </a:p>
@@ -2103,7 +2103,7 @@
             </a:pPr>
             <a:fld id="{6B163584-9EE8-4040-9885-C75BCF359956}" type="datetime1">
               <a:rPr lang="ko-KR" altLang="en-US" smtClean="0"/>
-              <a:t>2026. 4. 27.</a:t>
+              <a:t>2026. 4. 28.</a:t>
             </a:fld>
             <a:endParaRPr lang="en-US"/>
           </a:p>
@@ -2534,7 +2534,7 @@
             </a:pPr>
             <a:fld id="{26FF218A-7127-3D4A-ADEE-B3FFEA362F9C}" type="datetime1">
               <a:rPr lang="ko-KR" altLang="en-US" smtClean="0"/>
-              <a:t>2026. 4. 27.</a:t>
+              <a:t>2026. 4. 28.</a:t>
             </a:fld>
             <a:endParaRPr lang="en-US"/>
           </a:p>
@@ -2694,7 +2694,7 @@
             </a:pPr>
             <a:fld id="{472CFB89-3091-104D-BB74-060507CD1670}" type="datetime1">
               <a:rPr lang="ko-KR" altLang="en-US" smtClean="0"/>
-              <a:t>2026. 4. 27.</a:t>
+              <a:t>2026. 4. 28.</a:t>
             </a:fld>
             <a:endParaRPr lang="en-US"/>
           </a:p>
@@ -2826,7 +2826,7 @@
             </a:pPr>
             <a:fld id="{33B2AFB7-2B5F-644C-B1BE-74AAFA0D34EE}" type="datetime1">
               <a:rPr lang="ko-KR" altLang="en-US" smtClean="0"/>
-              <a:t>2026. 4. 27.</a:t>
+              <a:t>2026. 4. 28.</a:t>
             </a:fld>
             <a:endParaRPr lang="en-US"/>
           </a:p>
@@ -3156,7 +3156,7 @@
             </a:pPr>
             <a:fld id="{A1357EAE-7D34-9F4A-BCD9-DF03ABB01627}" type="datetime1">
               <a:rPr lang="ko-KR" altLang="en-US" smtClean="0"/>
-              <a:t>2026. 4. 27.</a:t>
+              <a:t>2026. 4. 28.</a:t>
             </a:fld>
             <a:endParaRPr lang="en-US"/>
           </a:p>
@@ -3466,7 +3466,7 @@
             </a:pPr>
             <a:fld id="{C1BA2115-64C3-1049-BB83-4AAC6154A645}" type="datetime1">
               <a:rPr lang="ko-KR" altLang="en-US" smtClean="0"/>
-              <a:t>2026. 4. 27.</a:t>
+              <a:t>2026. 4. 28.</a:t>
             </a:fld>
             <a:endParaRPr lang="en-US"/>
           </a:p>
@@ -3783,7 +3783,7 @@
             </a:pPr>
             <a:fld id="{781DC072-4254-4E4C-8A00-19925AF73734}" type="datetime1">
               <a:rPr lang="ko-KR" altLang="en-US" smtClean="0"/>
-              <a:t>2026. 4. 27.</a:t>
+              <a:t>2026. 4. 28.</a:t>
             </a:fld>
             <a:endParaRPr lang="en-US"/>
           </a:p>
@@ -6000,7 +6000,7 @@
                     <a:p>
                       <a:pPr algn="ctr"/>
                       <a:r>
-                        <a:rPr lang="en-US" altLang="ko-KR" sz="1000">
+                        <a:rPr lang="en-US" altLang="ko-KR" sz="1000" dirty="0">
                           <a:effectLst/>
                           <a:latin typeface="Arial" panose="020B0604020202020204" pitchFamily="34" charset="0"/>
                         </a:rPr>
@@ -8707,7 +8707,7 @@
                     <a:p>
                       <a:pPr algn="r"/>
                       <a:r>
-                        <a:rPr lang="en-US" altLang="ko-KR" sz="1200">
+                        <a:rPr lang="en-US" altLang="ko-KR" sz="1200" dirty="0">
                           <a:effectLst/>
                           <a:latin typeface="Arial" panose="020B0604020202020204" pitchFamily="34" charset="0"/>
                         </a:rPr>
@@ -16628,7 +16628,7 @@
         </p:blipFill>
         <p:spPr>
           <a:xfrm>
-            <a:off x="154897" y="2281799"/>
+            <a:off x="154897" y="2285479"/>
             <a:ext cx="2698951" cy="1225724"/>
           </a:xfrm>
           <a:prstGeom prst="rect">
@@ -17138,7 +17138,7 @@
         </p:blipFill>
         <p:spPr>
           <a:xfrm>
-            <a:off x="237723" y="5095720"/>
+            <a:off x="618723" y="5099942"/>
             <a:ext cx="6375400" cy="863600"/>
           </a:xfrm>
           <a:prstGeom prst="rect">
@@ -17191,14 +17191,14 @@
           <p:nvPr>
             <p:extLst>
               <p:ext uri="{D42A27DB-BD31-4B8C-83A1-F6EECF244321}">
-                <p14:modId xmlns:p14="http://schemas.microsoft.com/office/powerpoint/2010/main" val="3278664400"/>
+                <p14:modId xmlns:p14="http://schemas.microsoft.com/office/powerpoint/2010/main" val="2174991519"/>
               </p:ext>
             </p:extLst>
           </p:nvPr>
         </p:nvGraphicFramePr>
         <p:xfrm>
           <a:off x="7643191" y="1892885"/>
-          <a:ext cx="4463487" cy="4498321"/>
+          <a:ext cx="4463487" cy="4315059"/>
         </p:xfrm>
         <a:graphic>
           <a:graphicData uri="http://schemas.openxmlformats.org/drawingml/2006/table">
@@ -18412,7 +18412,7 @@
                     <a:p>
                       <a:pPr algn="ctr"/>
                       <a:r>
-                        <a:rPr lang="en-US" altLang="ko-KR" sz="1000">
+                        <a:rPr lang="en-US" altLang="ko-KR" sz="1000" dirty="0">
                           <a:effectLst/>
                           <a:latin typeface="Arial" panose="020B0604020202020204" pitchFamily="34" charset="0"/>
                         </a:rPr>
@@ -18806,7 +18806,7 @@
                     <a:p>
                       <a:pPr algn="ctr"/>
                       <a:r>
-                        <a:rPr lang="en-US" altLang="ko-KR" sz="1000">
+                        <a:rPr lang="en-US" altLang="ko-KR" sz="1000" dirty="0">
                           <a:effectLst/>
                           <a:latin typeface="Arial" panose="020B0604020202020204" pitchFamily="34" charset="0"/>
                         </a:rPr>
@@ -19200,7 +19200,7 @@
                     <a:p>
                       <a:pPr algn="ctr"/>
                       <a:r>
-                        <a:rPr lang="en-US" altLang="ko-KR" sz="1000">
+                        <a:rPr lang="en-US" altLang="ko-KR" sz="1000" dirty="0">
                           <a:effectLst/>
                           <a:latin typeface="Arial" panose="020B0604020202020204" pitchFamily="34" charset="0"/>
                         </a:rPr>
@@ -19594,7 +19594,7 @@
                     <a:p>
                       <a:pPr algn="ctr"/>
                       <a:r>
-                        <a:rPr lang="en-US" altLang="ko-KR" sz="1000">
+                        <a:rPr lang="en-US" altLang="ko-KR" sz="1000" dirty="0">
                           <a:effectLst/>
                           <a:latin typeface="Arial" panose="020B0604020202020204" pitchFamily="34" charset="0"/>
                         </a:rPr>
@@ -19988,7 +19988,7 @@
                     <a:p>
                       <a:pPr algn="ctr"/>
                       <a:r>
-                        <a:rPr lang="en-US" altLang="ko-KR" sz="1000">
+                        <a:rPr lang="en-US" altLang="ko-KR" sz="1000" dirty="0">
                           <a:effectLst/>
                           <a:latin typeface="Arial" panose="020B0604020202020204" pitchFamily="34" charset="0"/>
                         </a:rPr>
@@ -20217,7 +20217,7 @@
                     <a:p>
                       <a:pPr algn="ctr"/>
                       <a:r>
-                        <a:rPr lang="en-US" altLang="ko-KR" sz="1000">
+                        <a:rPr lang="en-US" altLang="ko-KR" sz="1000" dirty="0">
                           <a:effectLst/>
                           <a:latin typeface="Arial" panose="020B0604020202020204" pitchFamily="34" charset="0"/>
                         </a:rPr>
@@ -20776,7 +20776,7 @@
                     <a:p>
                       <a:pPr algn="ctr"/>
                       <a:r>
-                        <a:rPr lang="en-US" altLang="ko-KR" sz="1000">
+                        <a:rPr lang="en-US" altLang="ko-KR" sz="1000" dirty="0">
                           <a:effectLst/>
                           <a:latin typeface="Arial" panose="020B0604020202020204" pitchFamily="34" charset="0"/>
                         </a:rPr>
@@ -21170,7 +21170,7 @@
                     <a:p>
                       <a:pPr algn="ctr"/>
                       <a:r>
-                        <a:rPr lang="en-US" altLang="ko-KR" sz="1000">
+                        <a:rPr lang="en-US" altLang="ko-KR" sz="1000" dirty="0">
                           <a:effectLst/>
                           <a:latin typeface="Arial" panose="020B0604020202020204" pitchFamily="34" charset="0"/>
                         </a:rPr>
@@ -21564,7 +21564,7 @@
                     <a:p>
                       <a:pPr algn="ctr"/>
                       <a:r>
-                        <a:rPr lang="en-US" altLang="ko-KR" sz="1000">
+                        <a:rPr lang="en-US" altLang="ko-KR" sz="1000" dirty="0">
                           <a:effectLst/>
                           <a:latin typeface="Arial" panose="020B0604020202020204" pitchFamily="34" charset="0"/>
                         </a:rPr>
@@ -21958,7 +21958,7 @@
                     <a:p>
                       <a:pPr algn="ctr"/>
                       <a:r>
-                        <a:rPr lang="en-US" altLang="ko-KR" sz="1000">
+                        <a:rPr lang="en-US" altLang="ko-KR" sz="1000" dirty="0">
                           <a:effectLst/>
                           <a:latin typeface="Arial" panose="020B0604020202020204" pitchFamily="34" charset="0"/>
                         </a:rPr>
@@ -22406,7 +22406,7 @@
                   </a:ext>
                 </a:extLst>
               </a:tr>
-              <a:tr h="371232">
+              <a:tr h="0">
                 <a:tc>
                   <a:txBody>
                     <a:bodyPr/>
